--- a/AI漫剧制作课程/PPT课件/模块04-即梦AI深度精通.pptx
+++ b/AI漫剧制作课程/PPT课件/模块04-即梦AI深度精通.pptx
@@ -16119,7 +16119,7 @@
               </a:defRPr>
             </a:pPr>
             <a:r>
-              <a:t>🛠️  本模块实操任务</a:t>
+              <a:t>◆  本模块实操任务</a:t>
             </a:r>
           </a:p>
         </p:txBody>
@@ -19886,7 +19886,7 @@
               </a:defRPr>
             </a:pPr>
             <a:r>
-              <a:t>✓</a:t>
+              <a:t>◆</a:t>
             </a:r>
           </a:p>
         </p:txBody>
@@ -22003,7 +22003,7 @@
               </a:defRPr>
             </a:pPr>
             <a:r>
-              <a:t>📋  本节内容</a:t>
+              <a:t>§  本节内容</a:t>
             </a:r>
           </a:p>
         </p:txBody>
@@ -24195,7 +24195,7 @@
               </a:defRPr>
             </a:pPr>
             <a:r>
-              <a:t>📊  📊 即梦AI核心数据</a:t>
+              <a:t>▤  ▤ 即梦AI核心数据</a:t>
             </a:r>
           </a:p>
         </p:txBody>
